--- a/figures/edited/fig5_edited.pptx
+++ b/figures/edited/fig5_edited.pptx
@@ -243,7 +243,7 @@
           <a:p>
             <a:fld id="{63855345-2EAC-1C42-9A56-BEB145B34366}" type="datetimeFigureOut">
               <a:rPr lang="en-US" smtClean="0"/>
-              <a:t>5/31/26</a:t>
+              <a:t>6/18/26</a:t>
             </a:fld>
             <a:endParaRPr lang="en-US"/>
           </a:p>
@@ -413,7 +413,7 @@
           <a:p>
             <a:fld id="{63855345-2EAC-1C42-9A56-BEB145B34366}" type="datetimeFigureOut">
               <a:rPr lang="en-US" smtClean="0"/>
-              <a:t>5/31/26</a:t>
+              <a:t>6/18/26</a:t>
             </a:fld>
             <a:endParaRPr lang="en-US"/>
           </a:p>
@@ -593,7 +593,7 @@
           <a:p>
             <a:fld id="{63855345-2EAC-1C42-9A56-BEB145B34366}" type="datetimeFigureOut">
               <a:rPr lang="en-US" smtClean="0"/>
-              <a:t>5/31/26</a:t>
+              <a:t>6/18/26</a:t>
             </a:fld>
             <a:endParaRPr lang="en-US"/>
           </a:p>
@@ -763,7 +763,7 @@
           <a:p>
             <a:fld id="{63855345-2EAC-1C42-9A56-BEB145B34366}" type="datetimeFigureOut">
               <a:rPr lang="en-US" smtClean="0"/>
-              <a:t>5/31/26</a:t>
+              <a:t>6/18/26</a:t>
             </a:fld>
             <a:endParaRPr lang="en-US"/>
           </a:p>
@@ -1009,7 +1009,7 @@
           <a:p>
             <a:fld id="{63855345-2EAC-1C42-9A56-BEB145B34366}" type="datetimeFigureOut">
               <a:rPr lang="en-US" smtClean="0"/>
-              <a:t>5/31/26</a:t>
+              <a:t>6/18/26</a:t>
             </a:fld>
             <a:endParaRPr lang="en-US"/>
           </a:p>
@@ -1241,7 +1241,7 @@
           <a:p>
             <a:fld id="{63855345-2EAC-1C42-9A56-BEB145B34366}" type="datetimeFigureOut">
               <a:rPr lang="en-US" smtClean="0"/>
-              <a:t>5/31/26</a:t>
+              <a:t>6/18/26</a:t>
             </a:fld>
             <a:endParaRPr lang="en-US"/>
           </a:p>
@@ -1608,7 +1608,7 @@
           <a:p>
             <a:fld id="{63855345-2EAC-1C42-9A56-BEB145B34366}" type="datetimeFigureOut">
               <a:rPr lang="en-US" smtClean="0"/>
-              <a:t>5/31/26</a:t>
+              <a:t>6/18/26</a:t>
             </a:fld>
             <a:endParaRPr lang="en-US"/>
           </a:p>
@@ -1726,7 +1726,7 @@
           <a:p>
             <a:fld id="{63855345-2EAC-1C42-9A56-BEB145B34366}" type="datetimeFigureOut">
               <a:rPr lang="en-US" smtClean="0"/>
-              <a:t>5/31/26</a:t>
+              <a:t>6/18/26</a:t>
             </a:fld>
             <a:endParaRPr lang="en-US"/>
           </a:p>
@@ -1821,7 +1821,7 @@
           <a:p>
             <a:fld id="{63855345-2EAC-1C42-9A56-BEB145B34366}" type="datetimeFigureOut">
               <a:rPr lang="en-US" smtClean="0"/>
-              <a:t>5/31/26</a:t>
+              <a:t>6/18/26</a:t>
             </a:fld>
             <a:endParaRPr lang="en-US"/>
           </a:p>
@@ -2098,7 +2098,7 @@
           <a:p>
             <a:fld id="{63855345-2EAC-1C42-9A56-BEB145B34366}" type="datetimeFigureOut">
               <a:rPr lang="en-US" smtClean="0"/>
-              <a:t>5/31/26</a:t>
+              <a:t>6/18/26</a:t>
             </a:fld>
             <a:endParaRPr lang="en-US"/>
           </a:p>
@@ -2355,7 +2355,7 @@
           <a:p>
             <a:fld id="{63855345-2EAC-1C42-9A56-BEB145B34366}" type="datetimeFigureOut">
               <a:rPr lang="en-US" smtClean="0"/>
-              <a:t>5/31/26</a:t>
+              <a:t>6/18/26</a:t>
             </a:fld>
             <a:endParaRPr lang="en-US"/>
           </a:p>
@@ -2568,7 +2568,7 @@
           <a:p>
             <a:fld id="{63855345-2EAC-1C42-9A56-BEB145B34366}" type="datetimeFigureOut">
               <a:rPr lang="en-US" smtClean="0"/>
-              <a:t>5/31/26</a:t>
+              <a:t>6/18/26</a:t>
             </a:fld>
             <a:endParaRPr lang="en-US"/>
           </a:p>
@@ -2989,9 +2989,8 @@
         </p:nvPicPr>
         <p:blipFill>
           <a:blip r:embed="rId2"/>
-          <a:stretch>
-            <a:fillRect/>
-          </a:stretch>
+          <a:srcRect/>
+          <a:stretch/>
         </p:blipFill>
         <p:spPr>
           <a:xfrm>

--- a/figures/edited/fig5_edited.pptx
+++ b/figures/edited/fig5_edited.pptx
@@ -243,7 +243,7 @@
           <a:p>
             <a:fld id="{63855345-2EAC-1C42-9A56-BEB145B34366}" type="datetimeFigureOut">
               <a:rPr lang="en-US" smtClean="0"/>
-              <a:t>6/18/26</a:t>
+              <a:t>7/1/26</a:t>
             </a:fld>
             <a:endParaRPr lang="en-US"/>
           </a:p>
@@ -413,7 +413,7 @@
           <a:p>
             <a:fld id="{63855345-2EAC-1C42-9A56-BEB145B34366}" type="datetimeFigureOut">
               <a:rPr lang="en-US" smtClean="0"/>
-              <a:t>6/18/26</a:t>
+              <a:t>7/1/26</a:t>
             </a:fld>
             <a:endParaRPr lang="en-US"/>
           </a:p>
@@ -593,7 +593,7 @@
           <a:p>
             <a:fld id="{63855345-2EAC-1C42-9A56-BEB145B34366}" type="datetimeFigureOut">
               <a:rPr lang="en-US" smtClean="0"/>
-              <a:t>6/18/26</a:t>
+              <a:t>7/1/26</a:t>
             </a:fld>
             <a:endParaRPr lang="en-US"/>
           </a:p>
@@ -763,7 +763,7 @@
           <a:p>
             <a:fld id="{63855345-2EAC-1C42-9A56-BEB145B34366}" type="datetimeFigureOut">
               <a:rPr lang="en-US" smtClean="0"/>
-              <a:t>6/18/26</a:t>
+              <a:t>7/1/26</a:t>
             </a:fld>
             <a:endParaRPr lang="en-US"/>
           </a:p>
@@ -1009,7 +1009,7 @@
           <a:p>
             <a:fld id="{63855345-2EAC-1C42-9A56-BEB145B34366}" type="datetimeFigureOut">
               <a:rPr lang="en-US" smtClean="0"/>
-              <a:t>6/18/26</a:t>
+              <a:t>7/1/26</a:t>
             </a:fld>
             <a:endParaRPr lang="en-US"/>
           </a:p>
@@ -1241,7 +1241,7 @@
           <a:p>
             <a:fld id="{63855345-2EAC-1C42-9A56-BEB145B34366}" type="datetimeFigureOut">
               <a:rPr lang="en-US" smtClean="0"/>
-              <a:t>6/18/26</a:t>
+              <a:t>7/1/26</a:t>
             </a:fld>
             <a:endParaRPr lang="en-US"/>
           </a:p>
@@ -1608,7 +1608,7 @@
           <a:p>
             <a:fld id="{63855345-2EAC-1C42-9A56-BEB145B34366}" type="datetimeFigureOut">
               <a:rPr lang="en-US" smtClean="0"/>
-              <a:t>6/18/26</a:t>
+              <a:t>7/1/26</a:t>
             </a:fld>
             <a:endParaRPr lang="en-US"/>
           </a:p>
@@ -1726,7 +1726,7 @@
           <a:p>
             <a:fld id="{63855345-2EAC-1C42-9A56-BEB145B34366}" type="datetimeFigureOut">
               <a:rPr lang="en-US" smtClean="0"/>
-              <a:t>6/18/26</a:t>
+              <a:t>7/1/26</a:t>
             </a:fld>
             <a:endParaRPr lang="en-US"/>
           </a:p>
@@ -1821,7 +1821,7 @@
           <a:p>
             <a:fld id="{63855345-2EAC-1C42-9A56-BEB145B34366}" type="datetimeFigureOut">
               <a:rPr lang="en-US" smtClean="0"/>
-              <a:t>6/18/26</a:t>
+              <a:t>7/1/26</a:t>
             </a:fld>
             <a:endParaRPr lang="en-US"/>
           </a:p>
@@ -2098,7 +2098,7 @@
           <a:p>
             <a:fld id="{63855345-2EAC-1C42-9A56-BEB145B34366}" type="datetimeFigureOut">
               <a:rPr lang="en-US" smtClean="0"/>
-              <a:t>6/18/26</a:t>
+              <a:t>7/1/26</a:t>
             </a:fld>
             <a:endParaRPr lang="en-US"/>
           </a:p>
@@ -2355,7 +2355,7 @@
           <a:p>
             <a:fld id="{63855345-2EAC-1C42-9A56-BEB145B34366}" type="datetimeFigureOut">
               <a:rPr lang="en-US" smtClean="0"/>
-              <a:t>6/18/26</a:t>
+              <a:t>7/1/26</a:t>
             </a:fld>
             <a:endParaRPr lang="en-US"/>
           </a:p>
@@ -2568,7 +2568,7 @@
           <a:p>
             <a:fld id="{63855345-2EAC-1C42-9A56-BEB145B34366}" type="datetimeFigureOut">
               <a:rPr lang="en-US" smtClean="0"/>
-              <a:t>6/18/26</a:t>
+              <a:t>7/1/26</a:t>
             </a:fld>
             <a:endParaRPr lang="en-US"/>
           </a:p>
@@ -3356,6 +3356,178 @@
           </a:p>
         </p:txBody>
       </p:sp>
+      <p:sp>
+        <p:nvSpPr>
+          <p:cNvPr id="8" name="Rectangle 7">
+            <a:extLst>
+              <a:ext uri="{FF2B5EF4-FFF2-40B4-BE49-F238E27FC236}">
+                <a16:creationId xmlns:a16="http://schemas.microsoft.com/office/drawing/2014/main" id="{7C6AAD2B-56A8-80CC-058B-096B84C750AC}"/>
+              </a:ext>
+            </a:extLst>
+          </p:cNvPr>
+          <p:cNvSpPr/>
+          <p:nvPr/>
+        </p:nvSpPr>
+        <p:spPr>
+          <a:xfrm>
+            <a:off x="2268886" y="317352"/>
+            <a:ext cx="938850" cy="215444"/>
+          </a:xfrm>
+          <a:prstGeom prst="rect">
+            <a:avLst/>
+          </a:prstGeom>
+          <a:noFill/>
+          <a:ln w="6350"/>
+        </p:spPr>
+        <p:style>
+          <a:lnRef idx="2">
+            <a:schemeClr val="accent1">
+              <a:shade val="15000"/>
+            </a:schemeClr>
+          </a:lnRef>
+          <a:fillRef idx="1">
+            <a:schemeClr val="accent1"/>
+          </a:fillRef>
+          <a:effectRef idx="0">
+            <a:schemeClr val="accent1"/>
+          </a:effectRef>
+          <a:fontRef idx="minor">
+            <a:schemeClr val="lt1"/>
+          </a:fontRef>
+        </p:style>
+        <p:txBody>
+          <a:bodyPr rtlCol="0" anchor="ctr"/>
+          <a:lstStyle/>
+          <a:p>
+            <a:pPr algn="ctr"/>
+            <a:endParaRPr lang="en-US"/>
+          </a:p>
+        </p:txBody>
+      </p:sp>
+      <p:sp>
+        <p:nvSpPr>
+          <p:cNvPr id="9" name="TextBox 8">
+            <a:extLst>
+              <a:ext uri="{FF2B5EF4-FFF2-40B4-BE49-F238E27FC236}">
+                <a16:creationId xmlns:a16="http://schemas.microsoft.com/office/drawing/2014/main" id="{D7274E49-DA3A-788C-45C6-30E9BA6BF88D}"/>
+              </a:ext>
+            </a:extLst>
+          </p:cNvPr>
+          <p:cNvSpPr txBox="1"/>
+          <p:nvPr/>
+        </p:nvSpPr>
+        <p:spPr>
+          <a:xfrm>
+            <a:off x="2408734" y="129091"/>
+            <a:ext cx="659155" cy="215444"/>
+          </a:xfrm>
+          <a:prstGeom prst="rect">
+            <a:avLst/>
+          </a:prstGeom>
+          <a:noFill/>
+        </p:spPr>
+        <p:txBody>
+          <a:bodyPr wrap="none" rtlCol="0">
+            <a:spAutoFit/>
+          </a:bodyPr>
+          <a:lstStyle/>
+          <a:p>
+            <a:pPr algn="ctr"/>
+            <a:r>
+              <a:rPr lang="en-US" sz="800" b="1" dirty="0">
+                <a:latin typeface="Helvetica" pitchFamily="2" charset="0"/>
+              </a:rPr>
+              <a:t>Genotype</a:t>
+            </a:r>
+          </a:p>
+        </p:txBody>
+      </p:sp>
+      <p:sp>
+        <p:nvSpPr>
+          <p:cNvPr id="11" name="Rectangle 10">
+            <a:extLst>
+              <a:ext uri="{FF2B5EF4-FFF2-40B4-BE49-F238E27FC236}">
+                <a16:creationId xmlns:a16="http://schemas.microsoft.com/office/drawing/2014/main" id="{05AC0973-6CAA-764A-3810-0B0C67452090}"/>
+              </a:ext>
+            </a:extLst>
+          </p:cNvPr>
+          <p:cNvSpPr/>
+          <p:nvPr/>
+        </p:nvSpPr>
+        <p:spPr>
+          <a:xfrm>
+            <a:off x="3347584" y="317352"/>
+            <a:ext cx="1713443" cy="215444"/>
+          </a:xfrm>
+          <a:prstGeom prst="rect">
+            <a:avLst/>
+          </a:prstGeom>
+          <a:noFill/>
+          <a:ln w="6350"/>
+        </p:spPr>
+        <p:style>
+          <a:lnRef idx="2">
+            <a:schemeClr val="accent1">
+              <a:shade val="15000"/>
+            </a:schemeClr>
+          </a:lnRef>
+          <a:fillRef idx="1">
+            <a:schemeClr val="accent1"/>
+          </a:fillRef>
+          <a:effectRef idx="0">
+            <a:schemeClr val="accent1"/>
+          </a:effectRef>
+          <a:fontRef idx="minor">
+            <a:schemeClr val="lt1"/>
+          </a:fontRef>
+        </p:style>
+        <p:txBody>
+          <a:bodyPr rtlCol="0" anchor="ctr"/>
+          <a:lstStyle/>
+          <a:p>
+            <a:pPr algn="ctr"/>
+            <a:endParaRPr lang="en-US"/>
+          </a:p>
+        </p:txBody>
+      </p:sp>
+      <p:sp>
+        <p:nvSpPr>
+          <p:cNvPr id="13" name="TextBox 12">
+            <a:extLst>
+              <a:ext uri="{FF2B5EF4-FFF2-40B4-BE49-F238E27FC236}">
+                <a16:creationId xmlns:a16="http://schemas.microsoft.com/office/drawing/2014/main" id="{DCAA9411-2612-B85E-3443-357771B946BC}"/>
+              </a:ext>
+            </a:extLst>
+          </p:cNvPr>
+          <p:cNvSpPr txBox="1"/>
+          <p:nvPr/>
+        </p:nvSpPr>
+        <p:spPr>
+          <a:xfrm>
+            <a:off x="3880340" y="129091"/>
+            <a:ext cx="647934" cy="215444"/>
+          </a:xfrm>
+          <a:prstGeom prst="rect">
+            <a:avLst/>
+          </a:prstGeom>
+          <a:noFill/>
+        </p:spPr>
+        <p:txBody>
+          <a:bodyPr wrap="none" rtlCol="0">
+            <a:spAutoFit/>
+          </a:bodyPr>
+          <a:lstStyle/>
+          <a:p>
+            <a:pPr algn="ctr"/>
+            <a:r>
+              <a:rPr lang="en-US" sz="800" b="1" dirty="0">
+                <a:latin typeface="Helvetica" pitchFamily="2" charset="0"/>
+              </a:rPr>
+              <a:t>Data type</a:t>
+            </a:r>
+          </a:p>
+        </p:txBody>
+      </p:sp>
     </p:spTree>
     <p:extLst>
       <p:ext uri="{BB962C8B-B14F-4D97-AF65-F5344CB8AC3E}">
